--- a/docs/operators/evidence/sw012-buehne-20260711/technical/public/presentation.pptx
+++ b/docs/operators/evidence/sw012-buehne-20260711/technical/public/presentation.pptx
@@ -3169,7 +3169,7 @@
             <a:r>
               <a:rPr sz="1100" b="1">
                 <a:solidFill>
-                  <a:srgbClr val="14213D"/>
+                  <a:srgbClr val="FFFFFF"/>
                 </a:solidFill>
                 <a:latin typeface="Arial"/>
               </a:rPr>
@@ -3204,7 +3204,7 @@
             <a:r>
               <a:rPr sz="1100" b="1">
                 <a:solidFill>
-                  <a:srgbClr val="14213D"/>
+                  <a:srgbClr val="FFFFFF"/>
                 </a:solidFill>
                 <a:latin typeface="Arial"/>
               </a:rPr>
@@ -3418,7 +3418,7 @@
             <a:r>
               <a:rPr sz="1100" b="1">
                 <a:solidFill>
-                  <a:srgbClr val="14213D"/>
+                  <a:srgbClr val="FFFFFF"/>
                 </a:solidFill>
                 <a:latin typeface="Arial"/>
               </a:rPr>
@@ -3453,7 +3453,7 @@
             <a:r>
               <a:rPr sz="1100" b="1">
                 <a:solidFill>
-                  <a:srgbClr val="14213D"/>
+                  <a:srgbClr val="FFFFFF"/>
                 </a:solidFill>
                 <a:latin typeface="Arial"/>
               </a:rPr>
@@ -3670,7 +3670,7 @@
             <a:r>
               <a:rPr sz="1100" b="1">
                 <a:solidFill>
-                  <a:srgbClr val="14213D"/>
+                  <a:srgbClr val="FFFFFF"/>
                 </a:solidFill>
                 <a:latin typeface="Arial"/>
               </a:rPr>
@@ -3705,7 +3705,7 @@
             <a:r>
               <a:rPr sz="1100" b="1">
                 <a:solidFill>
-                  <a:srgbClr val="14213D"/>
+                  <a:srgbClr val="FFFFFF"/>
                 </a:solidFill>
                 <a:latin typeface="Arial"/>
               </a:rPr>
@@ -3926,7 +3926,7 @@
             <a:r>
               <a:rPr sz="1100" b="1">
                 <a:solidFill>
-                  <a:srgbClr val="14213D"/>
+                  <a:srgbClr val="FFFFFF"/>
                 </a:solidFill>
                 <a:latin typeface="Arial"/>
               </a:rPr>
@@ -3961,7 +3961,7 @@
             <a:r>
               <a:rPr sz="1100" b="1">
                 <a:solidFill>
-                  <a:srgbClr val="14213D"/>
+                  <a:srgbClr val="FFFFFF"/>
                 </a:solidFill>
                 <a:latin typeface="Arial"/>
               </a:rPr>
@@ -4210,7 +4210,7 @@
             <a:r>
               <a:rPr sz="1100" b="1">
                 <a:solidFill>
-                  <a:srgbClr val="14213D"/>
+                  <a:srgbClr val="FFFFFF"/>
                 </a:solidFill>
                 <a:latin typeface="Arial"/>
               </a:rPr>
@@ -4245,7 +4245,7 @@
             <a:r>
               <a:rPr sz="1100" b="1">
                 <a:solidFill>
-                  <a:srgbClr val="14213D"/>
+                  <a:srgbClr val="FFFFFF"/>
                 </a:solidFill>
                 <a:latin typeface="Arial"/>
               </a:rPr>
